--- a/courses/learn_placement/module03-01-density-bins/slides.pptx
+++ b/courses/learn_placement/module03-01-density-bins/slides.pptx
@@ -16,6 +16,9 @@
     <p:sldId id="264" r:id="rId16"/>
     <p:sldId id="265" r:id="rId17"/>
     <p:sldId id="266" r:id="rId18"/>
+    <p:sldId id="267" r:id="rId19"/>
+    <p:sldId id="268" r:id="rId20"/>
+    <p:sldId id="269" r:id="rId21"/>
   </p:sldIdLst>
   <p:sldSz cx="12191695" cy="6858000" type="screen4x3"/>
   <p:notesSz cx="6858000" cy="9144000"/>
@@ -582,7 +585,7 @@
           <a:lstStyle/>
           <a:p>
             <a:r>
-              <a:t>Common traps: celebrating HPWL while cells pile into one bin; ignoring fixed pads A and D; mixing bbox and clique models in one report; keeping only the final SA iterate instead of the best; and forgetting that timing weights change the objective, not just the label.</a:t>
+              <a:t>In the browser lab track, open the **density-bins** lab from the tools shelf. Load the starter placement, run the algorithm once, and read HPWL—and density when the panel shows it. Work the challenges that lock the goldens, then come back to implement the same loop yourself.</a:t>
             </a:r>
           </a:p>
         </p:txBody>
@@ -652,6 +655,146 @@
           <a:lstStyle/>
           <a:p>
             <a:r>
+              <a:t>In the implement track, open this module's EXAMPLES.md Pseudocode section and the course common solvers. Parse `tiny_place.json`, run the algorithm with a deterministic seed, and print coordinates plus HPWL. Match the browser goldens before you claim the checklist.</a:t>
+            </a:r>
+          </a:p>
+        </p:txBody>
+      </p:sp>
+      <p:sp>
+        <p:nvSpPr>
+          <p:cNvPr id="4" name="Slide Number Placeholder 3"/>
+          <p:cNvSpPr>
+            <a:spLocks noGrp="1"/>
+          </p:cNvSpPr>
+          <p:nvPr>
+            <p:ph type="sldNum" idx="5" sz="quarter"/>
+          </p:nvPr>
+        </p:nvSpPr>
+        <p:spPr/>
+      </p:sp>
+    </p:spTree>
+  </p:cSld>
+  <p:clrMapOvr>
+    <a:masterClrMapping/>
+  </p:clrMapOvr>
+</p:notes>
+</file>
+
+<file path=ppt/notesSlides/notesSlide12.xml><?xml version="1.0" encoding="utf-8"?>
+<p:notes xmlns:a="http://schemas.openxmlformats.org/drawingml/2006/main" xmlns:p="http://schemas.openxmlformats.org/presentationml/2006/main" xmlns:r="http://schemas.openxmlformats.org/officeDocument/2006/relationships">
+  <p:cSld>
+    <p:spTree>
+      <p:nvGrpSpPr>
+        <p:cNvPr id="1" name=""/>
+        <p:cNvGrpSpPr/>
+        <p:nvPr/>
+      </p:nvGrpSpPr>
+      <p:grpSpPr>
+        <a:xfrm>
+          <a:off x="0" y="0"/>
+          <a:ext cx="0" cy="0"/>
+          <a:chOff x="0" y="0"/>
+          <a:chExt cx="0" cy="0"/>
+        </a:xfrm>
+      </p:grpSpPr>
+      <p:sp>
+        <p:nvSpPr>
+          <p:cNvPr id="2" name="Slide Image Placeholder 1"/>
+          <p:cNvSpPr>
+            <a:spLocks noGrp="1"/>
+          </p:cNvSpPr>
+          <p:nvPr>
+            <p:ph type="sldImg" idx="2"/>
+          </p:nvPr>
+        </p:nvSpPr>
+        <p:spPr/>
+      </p:sp>
+      <p:sp>
+        <p:nvSpPr>
+          <p:cNvPr id="3" name="Notes Placeholder 2"/>
+          <p:cNvSpPr>
+            <a:spLocks noGrp="1"/>
+          </p:cNvSpPr>
+          <p:nvPr>
+            <p:ph type="body" idx="3" sz="quarter"/>
+          </p:nvPr>
+        </p:nvSpPr>
+        <p:spPr/>
+        <p:txBody>
+          <a:bodyPr/>
+          <a:lstStyle/>
+          <a:p>
+            <a:r>
+              <a:t>Common traps: celebrating HPWL while cells pile into one bin; ignoring fixed pads A and D; mixing bbox and clique models in one report; keeping only the final SA iterate instead of the best; and forgetting that timing weights change the objective, not just the label.</a:t>
+            </a:r>
+          </a:p>
+        </p:txBody>
+      </p:sp>
+      <p:sp>
+        <p:nvSpPr>
+          <p:cNvPr id="4" name="Slide Number Placeholder 3"/>
+          <p:cNvSpPr>
+            <a:spLocks noGrp="1"/>
+          </p:cNvSpPr>
+          <p:nvPr>
+            <p:ph type="sldNum" idx="5" sz="quarter"/>
+          </p:nvPr>
+        </p:nvSpPr>
+        <p:spPr/>
+      </p:sp>
+    </p:spTree>
+  </p:cSld>
+  <p:clrMapOvr>
+    <a:masterClrMapping/>
+  </p:clrMapOvr>
+</p:notes>
+</file>
+
+<file path=ppt/notesSlides/notesSlide13.xml><?xml version="1.0" encoding="utf-8"?>
+<p:notes xmlns:a="http://schemas.openxmlformats.org/drawingml/2006/main" xmlns:p="http://schemas.openxmlformats.org/presentationml/2006/main" xmlns:r="http://schemas.openxmlformats.org/officeDocument/2006/relationships">
+  <p:cSld>
+    <p:spTree>
+      <p:nvGrpSpPr>
+        <p:cNvPr id="1" name=""/>
+        <p:cNvGrpSpPr/>
+        <p:nvPr/>
+      </p:nvGrpSpPr>
+      <p:grpSpPr>
+        <a:xfrm>
+          <a:off x="0" y="0"/>
+          <a:ext cx="0" cy="0"/>
+          <a:chOff x="0" y="0"/>
+          <a:chExt cx="0" cy="0"/>
+        </a:xfrm>
+      </p:grpSpPr>
+      <p:sp>
+        <p:nvSpPr>
+          <p:cNvPr id="2" name="Slide Image Placeholder 1"/>
+          <p:cNvSpPr>
+            <a:spLocks noGrp="1"/>
+          </p:cNvSpPr>
+          <p:nvPr>
+            <p:ph type="sldImg" idx="2"/>
+          </p:nvPr>
+        </p:nvSpPr>
+        <p:spPr/>
+      </p:sp>
+      <p:sp>
+        <p:nvSpPr>
+          <p:cNvPr id="3" name="Notes Placeholder 2"/>
+          <p:cNvSpPr>
+            <a:spLocks noGrp="1"/>
+          </p:cNvSpPr>
+          <p:nvPr>
+            <p:ph type="body" idx="3" sz="quarter"/>
+          </p:nvPr>
+        </p:nvSpPr>
+        <p:spPr/>
+        <p:txBody>
+          <a:bodyPr/>
+          <a:lstStyle/>
+          <a:p>
+            <a:r>
               <a:t>Complete the checklist for at least one track—preferably both. Implement until your metrics match the starter goldens. When you’re ready, take the short quiz, then continue to the next module.</a:t>
             </a:r>
           </a:p>
@@ -725,12 +868,6 @@
               <a:t>Assign each cell to a bin by coordinates, count occupants, then overflow equals sum of max(zero, count minus capacity). Report HPWL and overflow together. A pretty wirelength with piled bins fails the density half of placement.</a:t>
             </a:r>
           </a:p>
-          <a:p/>
-          <a:p>
-            <a:r>
-              <a:t>&lt;!-- algorithm-walkthrough --&gt;</a:t>
-            </a:r>
-          </a:p>
         </p:txBody>
       </p:sp>
       <p:sp>
@@ -798,7 +935,13 @@
           <a:lstStyle/>
           <a:p>
             <a:r>
-              <a:t>Density bins count cells on a regular grid. Default teaching grid is two-by-two over [0,8]×[0,8]. Capacity one means each bin may hold one cell before overflow.</a:t>
+              <a:t>Density bins count occupants per grid cell and sum overflow above capacity. Pseudocode always pairs that number with HPWL.</a:t>
+            </a:r>
+          </a:p>
+          <a:p/>
+          <a:p>
+            <a:r>
+              <a:t>Open this module's examples file and find the Pseudocode section. That written sketch is what you implement on the implement track and what the browser challenges measure.</a:t>
             </a:r>
           </a:p>
         </p:txBody>
@@ -868,7 +1011,7 @@
           <a:lstStyle/>
           <a:p>
             <a:r>
-              <a:t>On the spread starter with capacity one, two bins hold two cells each. Overflow sums to two even though HPWL is already fifty-two.</a:t>
+              <a:t>On a two-by-two grid with capacity one, both starter and golden still overflow by two. Raise capacity to two on golden and overflow drops to one.</a:t>
             </a:r>
           </a:p>
         </p:txBody>
@@ -938,7 +1081,7 @@
           <a:lstStyle/>
           <a:p>
             <a:r>
-              <a:t>Compact HPWL fourteen still piles three cells into one bin. Overflow remains two at capacity one—pretty wirelength is not automatic legality.</a:t>
+              <a:t>Density bins count cells on a regular grid. Default teaching grid is two-by-two over [0,8]×[0,8]. Capacity one means each bin may hold one cell before overflow.</a:t>
             </a:r>
           </a:p>
         </p:txBody>
@@ -1008,7 +1151,7 @@
           <a:lstStyle/>
           <a:p>
             <a:r>
-              <a:t>With capacity two on the golden placement, overflow drops to one. Capacity is part of the spec—quote it with the overflow number.</a:t>
+              <a:t>On the spread starter with capacity one, two bins hold two cells each. Overflow sums to two even though HPWL is already fifty-two.</a:t>
             </a:r>
           </a:p>
         </p:txBody>
@@ -1078,13 +1221,7 @@
           <a:lstStyle/>
           <a:p>
             <a:r>
-              <a:t>Always report wirelength and bin overflow. A placement that wins HPWL while stacking bins fails the density half of the story.</a:t>
-            </a:r>
-          </a:p>
-          <a:p/>
-          <a:p>
-            <a:r>
-              <a:t>&lt;!-- /algorithm-walkthrough --&gt;</a:t>
+              <a:t>Compact HPWL fourteen still piles three cells into one bin. Overflow remains two at capacity one—pretty wirelength is not automatic legality.</a:t>
             </a:r>
           </a:p>
         </p:txBody>
@@ -1154,7 +1291,7 @@
           <a:lstStyle/>
           <a:p>
             <a:r>
-              <a:t>In the browser lab track, open the **density-bins** lab from the tools shelf. Load the starter placement, run the algorithm once, and read HPWL—and density when the panel shows it. Work the challenges that lock the goldens, then come back to implement the same loop yourself.</a:t>
+              <a:t>With capacity two on the golden placement, overflow drops to one. Capacity is part of the spec—quote it with the overflow number.</a:t>
             </a:r>
           </a:p>
         </p:txBody>
@@ -1224,7 +1361,7 @@
           <a:lstStyle/>
           <a:p>
             <a:r>
-              <a:t>In the implement track, open this module’s examples and the course `common/` solvers. Parse `tiny_place.json`, run the algorithm with a deterministic seed, and print coordinates plus HPWL. Match the browser goldens before you claim the checklist.</a:t>
+              <a:t>Always report wirelength and bin overflow. A placement that wins HPWL while stacking bins fails the density half of the story.</a:t>
             </a:r>
           </a:p>
         </p:txBody>
@@ -4382,21 +4519,45 @@
                 </a:solidFill>
                 <a:latin typeface="Calibri"/>
               </a:rPr>
-              <a:t>Pitfalls</a:t>
-            </a:r>
-          </a:p>
-        </p:txBody>
-      </p:sp>
-      <p:sp>
-        <p:nvSpPr>
-          <p:cNvPr id="3" name="TextBox 2"/>
+              <a:t>HPWL and density travel together</a:t>
+            </a:r>
+          </a:p>
+        </p:txBody>
+      </p:sp>
+      <p:pic>
+        <p:nvPicPr>
+          <p:cNvPr id="3" name="Picture 2" descr="05-takeaway.png"/>
+          <p:cNvPicPr>
+            <a:picLocks noChangeAspect="1"/>
+          </p:cNvPicPr>
+          <p:nvPr/>
+        </p:nvPicPr>
+        <p:blipFill>
+          <a:blip r:embed="rId2"/>
+          <a:stretch>
+            <a:fillRect/>
+          </a:stretch>
+        </p:blipFill>
+        <p:spPr>
+          <a:xfrm>
+            <a:off x="548640" y="1143000"/>
+            <a:ext cx="9404113" cy="4572000"/>
+          </a:xfrm>
+          <a:prstGeom prst="rect">
+            <a:avLst/>
+          </a:prstGeom>
+        </p:spPr>
+      </p:pic>
+      <p:sp>
+        <p:nvSpPr>
+          <p:cNvPr id="4" name="TextBox 3"/>
           <p:cNvSpPr txBox="1"/>
           <p:nvPr/>
         </p:nvSpPr>
         <p:spPr>
           <a:xfrm>
-            <a:off x="548640" y="1234440"/>
-            <a:ext cx="11064240" cy="4937760"/>
+            <a:off x="548640" y="5897880"/>
+            <a:ext cx="11064240" cy="411480"/>
           </a:xfrm>
           <a:prstGeom prst="rect">
             <a:avLst/>
@@ -4409,32 +4570,26 @@
           </a:bodyPr>
           <a:lstStyle/>
           <a:p>
-            <a:pPr lvl="0" marL="457200" indent="-228600">
-              <a:buFont typeface="Calibri"/>
-              <a:spcAft>
-                <a:spcPts val="1000"/>
-              </a:spcAft>
-              <a:buSzPct val="100000"/>
-              <a:buChar char="•"/>
+            <a:pPr>
               <a:lnSpc>
                 <a:spcPts val="2200"/>
               </a:lnSpc>
             </a:pPr>
             <a:r>
-              <a:rPr sz="2000" b="0">
+              <a:rPr sz="1200" b="0">
                 <a:solidFill>
                   <a:srgbClr val="333333"/>
                 </a:solidFill>
                 <a:latin typeface="Calibri"/>
               </a:rPr>
-              <a:t>Common traps</a:t>
-            </a:r>
-          </a:p>
-        </p:txBody>
-      </p:sp>
-      <p:sp>
-        <p:nvSpPr>
-          <p:cNvPr id="4" name="TextBox 3"/>
+              <a:t>HPWL and density travel together</a:t>
+            </a:r>
+          </a:p>
+        </p:txBody>
+      </p:sp>
+      <p:sp>
+        <p:nvSpPr>
+          <p:cNvPr id="5" name="TextBox 4"/>
           <p:cNvSpPr txBox="1"/>
           <p:nvPr/>
         </p:nvSpPr>
@@ -4523,6 +4678,535 @@
                 </a:solidFill>
                 <a:latin typeface="Calibri"/>
               </a:rPr>
+              <a:t>Browser lab track</a:t>
+            </a:r>
+          </a:p>
+        </p:txBody>
+      </p:sp>
+      <p:sp>
+        <p:nvSpPr>
+          <p:cNvPr id="3" name="TextBox 2"/>
+          <p:cNvSpPr txBox="1"/>
+          <p:nvPr/>
+        </p:nvSpPr>
+        <p:spPr>
+          <a:xfrm>
+            <a:off x="548640" y="1234440"/>
+            <a:ext cx="11064240" cy="4937760"/>
+          </a:xfrm>
+          <a:prstGeom prst="rect">
+            <a:avLst/>
+          </a:prstGeom>
+          <a:noFill/>
+        </p:spPr>
+        <p:txBody>
+          <a:bodyPr wrap="square">
+            <a:noAutofit/>
+          </a:bodyPr>
+          <a:lstStyle/>
+          <a:p>
+            <a:pPr lvl="0" marL="457200" indent="-228600">
+              <a:buFont typeface="Calibri"/>
+              <a:spcAft>
+                <a:spcPts val="1000"/>
+              </a:spcAft>
+              <a:buSzPct val="100000"/>
+              <a:buChar char="•"/>
+              <a:lnSpc>
+                <a:spcPts val="2200"/>
+              </a:lnSpc>
+            </a:pPr>
+            <a:r>
+              <a:rPr sz="2000" b="0">
+                <a:solidFill>
+                  <a:srgbClr val="333333"/>
+                </a:solidFill>
+                <a:latin typeface="Calibri"/>
+              </a:rPr>
+              <a:t>In the browser lab track, open the </a:t>
+            </a:r>
+            <a:r>
+              <a:rPr sz="2000" b="1">
+                <a:solidFill>
+                  <a:srgbClr val="333333"/>
+                </a:solidFill>
+                <a:latin typeface="Calibri"/>
+              </a:rPr>
+              <a:t>density-bins</a:t>
+            </a:r>
+            <a:r>
+              <a:rPr sz="2000" b="0">
+                <a:solidFill>
+                  <a:srgbClr val="333333"/>
+                </a:solidFill>
+                <a:latin typeface="Calibri"/>
+              </a:rPr>
+              <a:t> lab from the tools shelf</a:t>
+            </a:r>
+          </a:p>
+          <a:p>
+            <a:pPr lvl="0" marL="457200" indent="-228600">
+              <a:buFont typeface="Calibri"/>
+              <a:spcAft>
+                <a:spcPts val="1000"/>
+              </a:spcAft>
+              <a:buSzPct val="100000"/>
+              <a:buChar char="•"/>
+              <a:lnSpc>
+                <a:spcPts val="2200"/>
+              </a:lnSpc>
+            </a:pPr>
+            <a:r>
+              <a:rPr sz="2000" b="0">
+                <a:solidFill>
+                  <a:srgbClr val="333333"/>
+                </a:solidFill>
+                <a:latin typeface="Calibri"/>
+              </a:rPr>
+              <a:t>Load the starter placement, run the algorithm once</a:t>
+            </a:r>
+          </a:p>
+          <a:p>
+            <a:pPr lvl="0" marL="457200" indent="-228600">
+              <a:buFont typeface="Calibri"/>
+              <a:spcAft>
+                <a:spcPts val="1000"/>
+              </a:spcAft>
+              <a:buSzPct val="100000"/>
+              <a:buChar char="•"/>
+              <a:lnSpc>
+                <a:spcPts val="2200"/>
+              </a:lnSpc>
+            </a:pPr>
+            <a:r>
+              <a:rPr sz="2000" b="0">
+                <a:solidFill>
+                  <a:srgbClr val="333333"/>
+                </a:solidFill>
+                <a:latin typeface="Calibri"/>
+              </a:rPr>
+              <a:t>Work the challenges that lock the goldens</a:t>
+            </a:r>
+          </a:p>
+        </p:txBody>
+      </p:sp>
+      <p:sp>
+        <p:nvSpPr>
+          <p:cNvPr id="4" name="TextBox 3"/>
+          <p:cNvSpPr txBox="1"/>
+          <p:nvPr/>
+        </p:nvSpPr>
+        <p:spPr>
+          <a:xfrm>
+            <a:off x="548640" y="6355080"/>
+            <a:ext cx="11064240" cy="320040"/>
+          </a:xfrm>
+          <a:prstGeom prst="rect">
+            <a:avLst/>
+          </a:prstGeom>
+          <a:noFill/>
+        </p:spPr>
+        <p:txBody>
+          <a:bodyPr wrap="square">
+            <a:noAutofit/>
+          </a:bodyPr>
+          <a:lstStyle/>
+          <a:p>
+            <a:pPr algn="r">
+              <a:lnSpc>
+                <a:spcPts val="2200"/>
+              </a:lnSpc>
+              <a:defRPr sz="1000" b="0">
+                <a:solidFill>
+                  <a:srgbClr val="666666"/>
+                </a:solidFill>
+                <a:latin typeface="Calibri"/>
+              </a:defRPr>
+            </a:pPr>
+            <a:r>
+              <a:t>learn_placement — 01 density bins</a:t>
+            </a:r>
+          </a:p>
+        </p:txBody>
+      </p:sp>
+    </p:spTree>
+  </p:cSld>
+  <p:clrMapOvr>
+    <a:masterClrMapping/>
+  </p:clrMapOvr>
+</p:sld>
+</file>
+
+<file path=ppt/slides/slide12.xml><?xml version="1.0" encoding="utf-8"?>
+<p:sld xmlns:a="http://schemas.openxmlformats.org/drawingml/2006/main" xmlns:p="http://schemas.openxmlformats.org/presentationml/2006/main" xmlns:r="http://schemas.openxmlformats.org/officeDocument/2006/relationships">
+  <p:cSld>
+    <p:spTree>
+      <p:nvGrpSpPr>
+        <p:cNvPr id="1" name=""/>
+        <p:cNvGrpSpPr/>
+        <p:nvPr/>
+      </p:nvGrpSpPr>
+      <p:grpSpPr/>
+      <p:sp>
+        <p:nvSpPr>
+          <p:cNvPr id="2" name="TextBox 1"/>
+          <p:cNvSpPr txBox="1"/>
+          <p:nvPr/>
+        </p:nvSpPr>
+        <p:spPr>
+          <a:xfrm>
+            <a:off x="548640" y="411480"/>
+            <a:ext cx="11064240" cy="777240"/>
+          </a:xfrm>
+          <a:prstGeom prst="rect">
+            <a:avLst/>
+          </a:prstGeom>
+          <a:noFill/>
+        </p:spPr>
+        <p:txBody>
+          <a:bodyPr wrap="square">
+            <a:noAutofit/>
+          </a:bodyPr>
+          <a:lstStyle/>
+          <a:p>
+            <a:pPr>
+              <a:lnSpc>
+                <a:spcPts val="2200"/>
+              </a:lnSpc>
+            </a:pPr>
+            <a:r>
+              <a:rPr sz="2800" b="1">
+                <a:solidFill>
+                  <a:srgbClr val="1A1A2E"/>
+                </a:solidFill>
+                <a:latin typeface="Calibri"/>
+              </a:rPr>
+              <a:t>Implement track</a:t>
+            </a:r>
+          </a:p>
+        </p:txBody>
+      </p:sp>
+      <p:sp>
+        <p:nvSpPr>
+          <p:cNvPr id="3" name="TextBox 2"/>
+          <p:cNvSpPr txBox="1"/>
+          <p:nvPr/>
+        </p:nvSpPr>
+        <p:spPr>
+          <a:xfrm>
+            <a:off x="548640" y="1234440"/>
+            <a:ext cx="11064240" cy="4937760"/>
+          </a:xfrm>
+          <a:prstGeom prst="rect">
+            <a:avLst/>
+          </a:prstGeom>
+          <a:noFill/>
+        </p:spPr>
+        <p:txBody>
+          <a:bodyPr wrap="square">
+            <a:noAutofit/>
+          </a:bodyPr>
+          <a:lstStyle/>
+          <a:p>
+            <a:pPr lvl="0" marL="457200" indent="-228600">
+              <a:buFont typeface="Calibri"/>
+              <a:spcAft>
+                <a:spcPts val="1000"/>
+              </a:spcAft>
+              <a:buSzPct val="100000"/>
+              <a:buChar char="•"/>
+              <a:lnSpc>
+                <a:spcPts val="2200"/>
+              </a:lnSpc>
+            </a:pPr>
+            <a:r>
+              <a:rPr sz="2000" b="0">
+                <a:solidFill>
+                  <a:srgbClr val="333333"/>
+                </a:solidFill>
+                <a:latin typeface="Calibri"/>
+              </a:rPr>
+              <a:t>In the implement track</a:t>
+            </a:r>
+          </a:p>
+          <a:p>
+            <a:pPr lvl="0" marL="457200" indent="-228600">
+              <a:buFont typeface="Calibri"/>
+              <a:spcAft>
+                <a:spcPts val="1000"/>
+              </a:spcAft>
+              <a:buSzPct val="100000"/>
+              <a:buChar char="•"/>
+              <a:lnSpc>
+                <a:spcPts val="2200"/>
+              </a:lnSpc>
+            </a:pPr>
+            <a:r>
+              <a:rPr sz="2000" b="0">
+                <a:solidFill>
+                  <a:srgbClr val="333333"/>
+                </a:solidFill>
+                <a:latin typeface="Calibri"/>
+              </a:rPr>
+              <a:t>Parse `tiny_place.json`, run the algorithm with a deterministic seed</a:t>
+            </a:r>
+          </a:p>
+          <a:p>
+            <a:pPr lvl="0" marL="457200" indent="-228600">
+              <a:buFont typeface="Calibri"/>
+              <a:spcAft>
+                <a:spcPts val="1000"/>
+              </a:spcAft>
+              <a:buSzPct val="100000"/>
+              <a:buChar char="•"/>
+              <a:lnSpc>
+                <a:spcPts val="2200"/>
+              </a:lnSpc>
+            </a:pPr>
+            <a:r>
+              <a:rPr sz="2000" b="0">
+                <a:solidFill>
+                  <a:srgbClr val="333333"/>
+                </a:solidFill>
+                <a:latin typeface="Calibri"/>
+              </a:rPr>
+              <a:t>Match the browser goldens before you claim the checklist</a:t>
+            </a:r>
+          </a:p>
+        </p:txBody>
+      </p:sp>
+      <p:sp>
+        <p:nvSpPr>
+          <p:cNvPr id="4" name="TextBox 3"/>
+          <p:cNvSpPr txBox="1"/>
+          <p:nvPr/>
+        </p:nvSpPr>
+        <p:spPr>
+          <a:xfrm>
+            <a:off x="548640" y="6355080"/>
+            <a:ext cx="11064240" cy="320040"/>
+          </a:xfrm>
+          <a:prstGeom prst="rect">
+            <a:avLst/>
+          </a:prstGeom>
+          <a:noFill/>
+        </p:spPr>
+        <p:txBody>
+          <a:bodyPr wrap="square">
+            <a:noAutofit/>
+          </a:bodyPr>
+          <a:lstStyle/>
+          <a:p>
+            <a:pPr algn="r">
+              <a:lnSpc>
+                <a:spcPts val="2200"/>
+              </a:lnSpc>
+              <a:defRPr sz="1000" b="0">
+                <a:solidFill>
+                  <a:srgbClr val="666666"/>
+                </a:solidFill>
+                <a:latin typeface="Calibri"/>
+              </a:defRPr>
+            </a:pPr>
+            <a:r>
+              <a:t>learn_placement — 01 density bins</a:t>
+            </a:r>
+          </a:p>
+        </p:txBody>
+      </p:sp>
+    </p:spTree>
+  </p:cSld>
+  <p:clrMapOvr>
+    <a:masterClrMapping/>
+  </p:clrMapOvr>
+</p:sld>
+</file>
+
+<file path=ppt/slides/slide13.xml><?xml version="1.0" encoding="utf-8"?>
+<p:sld xmlns:a="http://schemas.openxmlformats.org/drawingml/2006/main" xmlns:p="http://schemas.openxmlformats.org/presentationml/2006/main" xmlns:r="http://schemas.openxmlformats.org/officeDocument/2006/relationships">
+  <p:cSld>
+    <p:spTree>
+      <p:nvGrpSpPr>
+        <p:cNvPr id="1" name=""/>
+        <p:cNvGrpSpPr/>
+        <p:nvPr/>
+      </p:nvGrpSpPr>
+      <p:grpSpPr/>
+      <p:sp>
+        <p:nvSpPr>
+          <p:cNvPr id="2" name="TextBox 1"/>
+          <p:cNvSpPr txBox="1"/>
+          <p:nvPr/>
+        </p:nvSpPr>
+        <p:spPr>
+          <a:xfrm>
+            <a:off x="548640" y="411480"/>
+            <a:ext cx="11064240" cy="777240"/>
+          </a:xfrm>
+          <a:prstGeom prst="rect">
+            <a:avLst/>
+          </a:prstGeom>
+          <a:noFill/>
+        </p:spPr>
+        <p:txBody>
+          <a:bodyPr wrap="square">
+            <a:noAutofit/>
+          </a:bodyPr>
+          <a:lstStyle/>
+          <a:p>
+            <a:pPr>
+              <a:lnSpc>
+                <a:spcPts val="2200"/>
+              </a:lnSpc>
+            </a:pPr>
+            <a:r>
+              <a:rPr sz="2800" b="1">
+                <a:solidFill>
+                  <a:srgbClr val="1A1A2E"/>
+                </a:solidFill>
+                <a:latin typeface="Calibri"/>
+              </a:rPr>
+              <a:t>Pitfalls</a:t>
+            </a:r>
+          </a:p>
+        </p:txBody>
+      </p:sp>
+      <p:sp>
+        <p:nvSpPr>
+          <p:cNvPr id="3" name="TextBox 2"/>
+          <p:cNvSpPr txBox="1"/>
+          <p:nvPr/>
+        </p:nvSpPr>
+        <p:spPr>
+          <a:xfrm>
+            <a:off x="548640" y="1234440"/>
+            <a:ext cx="11064240" cy="4937760"/>
+          </a:xfrm>
+          <a:prstGeom prst="rect">
+            <a:avLst/>
+          </a:prstGeom>
+          <a:noFill/>
+        </p:spPr>
+        <p:txBody>
+          <a:bodyPr wrap="square">
+            <a:noAutofit/>
+          </a:bodyPr>
+          <a:lstStyle/>
+          <a:p>
+            <a:pPr lvl="0" marL="457200" indent="-228600">
+              <a:buFont typeface="Calibri"/>
+              <a:spcAft>
+                <a:spcPts val="1000"/>
+              </a:spcAft>
+              <a:buSzPct val="100000"/>
+              <a:buChar char="•"/>
+              <a:lnSpc>
+                <a:spcPts val="2200"/>
+              </a:lnSpc>
+            </a:pPr>
+            <a:r>
+              <a:rPr sz="2000" b="0">
+                <a:solidFill>
+                  <a:srgbClr val="333333"/>
+                </a:solidFill>
+                <a:latin typeface="Calibri"/>
+              </a:rPr>
+              <a:t>Common traps</a:t>
+            </a:r>
+          </a:p>
+        </p:txBody>
+      </p:sp>
+      <p:sp>
+        <p:nvSpPr>
+          <p:cNvPr id="4" name="TextBox 3"/>
+          <p:cNvSpPr txBox="1"/>
+          <p:nvPr/>
+        </p:nvSpPr>
+        <p:spPr>
+          <a:xfrm>
+            <a:off x="548640" y="6355080"/>
+            <a:ext cx="11064240" cy="320040"/>
+          </a:xfrm>
+          <a:prstGeom prst="rect">
+            <a:avLst/>
+          </a:prstGeom>
+          <a:noFill/>
+        </p:spPr>
+        <p:txBody>
+          <a:bodyPr wrap="square">
+            <a:noAutofit/>
+          </a:bodyPr>
+          <a:lstStyle/>
+          <a:p>
+            <a:pPr algn="r">
+              <a:lnSpc>
+                <a:spcPts val="2200"/>
+              </a:lnSpc>
+              <a:defRPr sz="1000" b="0">
+                <a:solidFill>
+                  <a:srgbClr val="666666"/>
+                </a:solidFill>
+                <a:latin typeface="Calibri"/>
+              </a:defRPr>
+            </a:pPr>
+            <a:r>
+              <a:t>learn_placement — 01 density bins</a:t>
+            </a:r>
+          </a:p>
+        </p:txBody>
+      </p:sp>
+    </p:spTree>
+  </p:cSld>
+  <p:clrMapOvr>
+    <a:masterClrMapping/>
+  </p:clrMapOvr>
+</p:sld>
+</file>
+
+<file path=ppt/slides/slide14.xml><?xml version="1.0" encoding="utf-8"?>
+<p:sld xmlns:a="http://schemas.openxmlformats.org/drawingml/2006/main" xmlns:p="http://schemas.openxmlformats.org/presentationml/2006/main" xmlns:r="http://schemas.openxmlformats.org/officeDocument/2006/relationships">
+  <p:cSld>
+    <p:spTree>
+      <p:nvGrpSpPr>
+        <p:cNvPr id="1" name=""/>
+        <p:cNvGrpSpPr/>
+        <p:nvPr/>
+      </p:nvGrpSpPr>
+      <p:grpSpPr/>
+      <p:sp>
+        <p:nvSpPr>
+          <p:cNvPr id="2" name="TextBox 1"/>
+          <p:cNvSpPr txBox="1"/>
+          <p:nvPr/>
+        </p:nvSpPr>
+        <p:spPr>
+          <a:xfrm>
+            <a:off x="548640" y="411480"/>
+            <a:ext cx="11064240" cy="777240"/>
+          </a:xfrm>
+          <a:prstGeom prst="rect">
+            <a:avLst/>
+          </a:prstGeom>
+          <a:noFill/>
+        </p:spPr>
+        <p:txBody>
+          <a:bodyPr wrap="square">
+            <a:noAutofit/>
+          </a:bodyPr>
+          <a:lstStyle/>
+          <a:p>
+            <a:pPr>
+              <a:lnSpc>
+                <a:spcPts val="2200"/>
+              </a:lnSpc>
+            </a:pPr>
+            <a:r>
+              <a:rPr sz="2800" b="1">
+                <a:solidFill>
+                  <a:srgbClr val="1A1A2E"/>
+                </a:solidFill>
+                <a:latin typeface="Calibri"/>
+              </a:rPr>
               <a:t>Your turn</a:t>
             </a:r>
           </a:p>
@@ -4800,6 +5484,125 @@
               <a:t>A pretty wirelength with piled bins fails the density half of placement</a:t>
             </a:r>
           </a:p>
+        </p:txBody>
+      </p:sp>
+      <p:sp>
+        <p:nvSpPr>
+          <p:cNvPr id="4" name="TextBox 3"/>
+          <p:cNvSpPr txBox="1"/>
+          <p:nvPr/>
+        </p:nvSpPr>
+        <p:spPr>
+          <a:xfrm>
+            <a:off x="548640" y="6355080"/>
+            <a:ext cx="11064240" cy="320040"/>
+          </a:xfrm>
+          <a:prstGeom prst="rect">
+            <a:avLst/>
+          </a:prstGeom>
+          <a:noFill/>
+        </p:spPr>
+        <p:txBody>
+          <a:bodyPr wrap="square">
+            <a:noAutofit/>
+          </a:bodyPr>
+          <a:lstStyle/>
+          <a:p>
+            <a:pPr algn="r">
+              <a:lnSpc>
+                <a:spcPts val="2200"/>
+              </a:lnSpc>
+              <a:defRPr sz="1000" b="0">
+                <a:solidFill>
+                  <a:srgbClr val="666666"/>
+                </a:solidFill>
+                <a:latin typeface="Calibri"/>
+              </a:defRPr>
+            </a:pPr>
+            <a:r>
+              <a:t>learn_placement — 01 density bins</a:t>
+            </a:r>
+          </a:p>
+        </p:txBody>
+      </p:sp>
+    </p:spTree>
+  </p:cSld>
+  <p:clrMapOvr>
+    <a:masterClrMapping/>
+  </p:clrMapOvr>
+</p:sld>
+</file>
+
+<file path=ppt/slides/slide3.xml><?xml version="1.0" encoding="utf-8"?>
+<p:sld xmlns:a="http://schemas.openxmlformats.org/drawingml/2006/main" xmlns:p="http://schemas.openxmlformats.org/presentationml/2006/main" xmlns:r="http://schemas.openxmlformats.org/officeDocument/2006/relationships">
+  <p:cSld>
+    <p:spTree>
+      <p:nvGrpSpPr>
+        <p:cNvPr id="1" name=""/>
+        <p:cNvGrpSpPr/>
+        <p:nvPr/>
+      </p:nvGrpSpPr>
+      <p:grpSpPr/>
+      <p:sp>
+        <p:nvSpPr>
+          <p:cNvPr id="2" name="TextBox 1"/>
+          <p:cNvSpPr txBox="1"/>
+          <p:nvPr/>
+        </p:nvSpPr>
+        <p:spPr>
+          <a:xfrm>
+            <a:off x="548640" y="411480"/>
+            <a:ext cx="11064240" cy="777240"/>
+          </a:xfrm>
+          <a:prstGeom prst="rect">
+            <a:avLst/>
+          </a:prstGeom>
+          <a:noFill/>
+        </p:spPr>
+        <p:txBody>
+          <a:bodyPr wrap="square">
+            <a:noAutofit/>
+          </a:bodyPr>
+          <a:lstStyle/>
+          <a:p>
+            <a:pPr>
+              <a:lnSpc>
+                <a:spcPts val="2200"/>
+              </a:lnSpc>
+            </a:pPr>
+            <a:r>
+              <a:rPr sz="2800" b="1">
+                <a:solidFill>
+                  <a:srgbClr val="1A1A2E"/>
+                </a:solidFill>
+                <a:latin typeface="Calibri"/>
+              </a:rPr>
+              <a:t>Pseudocode</a:t>
+            </a:r>
+          </a:p>
+        </p:txBody>
+      </p:sp>
+      <p:sp>
+        <p:nvSpPr>
+          <p:cNvPr id="3" name="TextBox 2"/>
+          <p:cNvSpPr txBox="1"/>
+          <p:nvPr/>
+        </p:nvSpPr>
+        <p:spPr>
+          <a:xfrm>
+            <a:off x="548640" y="1234440"/>
+            <a:ext cx="11064240" cy="4937760"/>
+          </a:xfrm>
+          <a:prstGeom prst="rect">
+            <a:avLst/>
+          </a:prstGeom>
+          <a:noFill/>
+        </p:spPr>
+        <p:txBody>
+          <a:bodyPr wrap="square">
+            <a:noAutofit/>
+          </a:bodyPr>
+          <a:lstStyle/>
           <a:p>
             <a:pPr lvl="0" marL="457200" indent="-228600">
               <a:buFont typeface="Calibri"/>
@@ -4819,7 +5622,73 @@
                 </a:solidFill>
                 <a:latin typeface="Calibri"/>
               </a:rPr>
-              <a:t>&lt;!-- algorithm-walkthrough --&gt;</a:t>
+              <a:t>Density bins count occupants per grid cell and sum overflow above capacity</a:t>
+            </a:r>
+          </a:p>
+          <a:p>
+            <a:pPr lvl="0" marL="457200" indent="-228600">
+              <a:buFont typeface="Calibri"/>
+              <a:spcAft>
+                <a:spcPts val="1000"/>
+              </a:spcAft>
+              <a:buSzPct val="100000"/>
+              <a:buChar char="•"/>
+              <a:lnSpc>
+                <a:spcPts val="2200"/>
+              </a:lnSpc>
+            </a:pPr>
+            <a:r>
+              <a:rPr sz="2000" b="0">
+                <a:solidFill>
+                  <a:srgbClr val="333333"/>
+                </a:solidFill>
+                <a:latin typeface="Calibri"/>
+              </a:rPr>
+              <a:t>Pseudocode always pairs that number with HPWL</a:t>
+            </a:r>
+          </a:p>
+          <a:p>
+            <a:pPr lvl="0" marL="457200" indent="-228600">
+              <a:buFont typeface="Calibri"/>
+              <a:spcAft>
+                <a:spcPts val="1000"/>
+              </a:spcAft>
+              <a:buSzPct val="100000"/>
+              <a:buChar char="•"/>
+              <a:lnSpc>
+                <a:spcPts val="2200"/>
+              </a:lnSpc>
+            </a:pPr>
+            <a:r>
+              <a:rPr sz="2000" b="0">
+                <a:solidFill>
+                  <a:srgbClr val="333333"/>
+                </a:solidFill>
+                <a:latin typeface="Calibri"/>
+              </a:rPr>
+              <a:t>Open this module's examples file and find the Pseudocode section</a:t>
+            </a:r>
+          </a:p>
+          <a:p>
+            <a:pPr lvl="0" marL="457200" indent="-228600">
+              <a:buFont typeface="Calibri"/>
+              <a:spcAft>
+                <a:spcPts val="1000"/>
+              </a:spcAft>
+              <a:buSzPct val="100000"/>
+              <a:buChar char="•"/>
+              <a:lnSpc>
+                <a:spcPts val="2200"/>
+              </a:lnSpc>
+            </a:pPr>
+            <a:r>
+              <a:rPr sz="2000" b="0">
+                <a:solidFill>
+                  <a:srgbClr val="333333"/>
+                </a:solidFill>
+                <a:latin typeface="Calibri"/>
+              </a:rPr>
+              <a:t>That written sketch is what you implement on the implement track and what the browser</a:t>
             </a:r>
           </a:p>
         </p:txBody>
@@ -4871,7 +5740,424 @@
 </p:sld>
 </file>
 
-<file path=ppt/slides/slide3.xml><?xml version="1.0" encoding="utf-8"?>
+<file path=ppt/slides/slide4.xml><?xml version="1.0" encoding="utf-8"?>
+<p:sld xmlns:a="http://schemas.openxmlformats.org/drawingml/2006/main" xmlns:p="http://schemas.openxmlformats.org/presentationml/2006/main" xmlns:r="http://schemas.openxmlformats.org/officeDocument/2006/relationships">
+  <p:cSld>
+    <p:spTree>
+      <p:nvGrpSpPr>
+        <p:cNvPr id="1" name=""/>
+        <p:cNvGrpSpPr/>
+        <p:nvPr/>
+      </p:nvGrpSpPr>
+      <p:grpSpPr/>
+      <p:sp>
+        <p:nvSpPr>
+          <p:cNvPr id="2" name="TextBox 1"/>
+          <p:cNvSpPr txBox="1"/>
+          <p:nvPr/>
+        </p:nvSpPr>
+        <p:spPr>
+          <a:xfrm>
+            <a:off x="548640" y="411480"/>
+            <a:ext cx="11064240" cy="777240"/>
+          </a:xfrm>
+          <a:prstGeom prst="rect">
+            <a:avLst/>
+          </a:prstGeom>
+          <a:noFill/>
+        </p:spPr>
+        <p:txBody>
+          <a:bodyPr wrap="square">
+            <a:noAutofit/>
+          </a:bodyPr>
+          <a:lstStyle/>
+          <a:p>
+            <a:pPr>
+              <a:lnSpc>
+                <a:spcPts val="2200"/>
+              </a:lnSpc>
+            </a:pPr>
+            <a:r>
+              <a:rPr sz="2800" b="1">
+                <a:solidFill>
+                  <a:srgbClr val="1A1A2E"/>
+                </a:solidFill>
+                <a:latin typeface="Calibri"/>
+              </a:rPr>
+              <a:t>Algorithm sketch</a:t>
+            </a:r>
+          </a:p>
+        </p:txBody>
+      </p:sp>
+      <p:sp>
+        <p:nvSpPr>
+          <p:cNvPr id="3" name="TextBox 2"/>
+          <p:cNvSpPr txBox="1"/>
+          <p:nvPr/>
+        </p:nvSpPr>
+        <p:spPr>
+          <a:xfrm>
+            <a:off x="548640" y="1234440"/>
+            <a:ext cx="11064240" cy="4937760"/>
+          </a:xfrm>
+          <a:prstGeom prst="rect">
+            <a:avLst/>
+          </a:prstGeom>
+          <a:noFill/>
+        </p:spPr>
+        <p:txBody>
+          <a:bodyPr wrap="square">
+            <a:noAutofit/>
+          </a:bodyPr>
+          <a:lstStyle/>
+          <a:p>
+            <a:pPr lvl="0" marL="457200" indent="-228600">
+              <a:buFont typeface="Calibri"/>
+              <a:spcAft>
+                <a:spcPts val="1000"/>
+              </a:spcAft>
+              <a:buSzPct val="100000"/>
+              <a:buChar char="•"/>
+              <a:lnSpc>
+                <a:spcPts val="2200"/>
+              </a:lnSpc>
+            </a:pPr>
+            <a:r>
+              <a:rPr sz="2000" b="0">
+                <a:solidFill>
+                  <a:srgbClr val="333333"/>
+                </a:solidFill>
+                <a:latin typeface="Calibri"/>
+              </a:rPr>
+              <a:t>On a two-by-two grid with capacity one, both starter and golden still overflow by two</a:t>
+            </a:r>
+          </a:p>
+          <a:p>
+            <a:pPr lvl="0" marL="457200" indent="-228600">
+              <a:buFont typeface="Calibri"/>
+              <a:spcAft>
+                <a:spcPts val="1000"/>
+              </a:spcAft>
+              <a:buSzPct val="100000"/>
+              <a:buChar char="•"/>
+              <a:lnSpc>
+                <a:spcPts val="2200"/>
+              </a:lnSpc>
+            </a:pPr>
+            <a:r>
+              <a:rPr sz="2000" b="0">
+                <a:solidFill>
+                  <a:srgbClr val="333333"/>
+                </a:solidFill>
+                <a:latin typeface="Calibri"/>
+              </a:rPr>
+              <a:t>Raise capacity to two on golden and overflow drops to one</a:t>
+            </a:r>
+          </a:p>
+        </p:txBody>
+      </p:sp>
+      <p:sp>
+        <p:nvSpPr>
+          <p:cNvPr id="4" name="TextBox 3"/>
+          <p:cNvSpPr txBox="1"/>
+          <p:nvPr/>
+        </p:nvSpPr>
+        <p:spPr>
+          <a:xfrm>
+            <a:off x="548640" y="6355080"/>
+            <a:ext cx="11064240" cy="320040"/>
+          </a:xfrm>
+          <a:prstGeom prst="rect">
+            <a:avLst/>
+          </a:prstGeom>
+          <a:noFill/>
+        </p:spPr>
+        <p:txBody>
+          <a:bodyPr wrap="square">
+            <a:noAutofit/>
+          </a:bodyPr>
+          <a:lstStyle/>
+          <a:p>
+            <a:pPr algn="r">
+              <a:lnSpc>
+                <a:spcPts val="2200"/>
+              </a:lnSpc>
+              <a:defRPr sz="1000" b="0">
+                <a:solidFill>
+                  <a:srgbClr val="666666"/>
+                </a:solidFill>
+                <a:latin typeface="Calibri"/>
+              </a:defRPr>
+            </a:pPr>
+            <a:r>
+              <a:t>learn_placement — 01 density bins</a:t>
+            </a:r>
+          </a:p>
+        </p:txBody>
+      </p:sp>
+    </p:spTree>
+  </p:cSld>
+  <p:clrMapOvr>
+    <a:masterClrMapping/>
+  </p:clrMapOvr>
+</p:sld>
+</file>
+
+<file path=ppt/slides/slide5.xml><?xml version="1.0" encoding="utf-8"?>
+<p:sld xmlns:a="http://schemas.openxmlformats.org/drawingml/2006/main" xmlns:p="http://schemas.openxmlformats.org/presentationml/2006/main" xmlns:r="http://schemas.openxmlformats.org/officeDocument/2006/relationships">
+  <p:cSld>
+    <p:spTree>
+      <p:nvGrpSpPr>
+        <p:cNvPr id="1" name=""/>
+        <p:cNvGrpSpPr/>
+        <p:nvPr/>
+      </p:nvGrpSpPr>
+      <p:grpSpPr/>
+      <p:sp>
+        <p:nvSpPr>
+          <p:cNvPr id="2" name="TextBox 1"/>
+          <p:cNvSpPr txBox="1"/>
+          <p:nvPr/>
+        </p:nvSpPr>
+        <p:spPr>
+          <a:xfrm>
+            <a:off x="548640" y="411480"/>
+            <a:ext cx="11064240" cy="777240"/>
+          </a:xfrm>
+          <a:prstGeom prst="rect">
+            <a:avLst/>
+          </a:prstGeom>
+          <a:noFill/>
+        </p:spPr>
+        <p:txBody>
+          <a:bodyPr wrap="square">
+            <a:noAutofit/>
+          </a:bodyPr>
+          <a:lstStyle/>
+          <a:p>
+            <a:pPr>
+              <a:lnSpc>
+                <a:spcPts val="2200"/>
+              </a:lnSpc>
+            </a:pPr>
+            <a:r>
+              <a:rPr sz="2800" b="1">
+                <a:solidFill>
+                  <a:srgbClr val="1A1A2E"/>
+                </a:solidFill>
+                <a:latin typeface="Calibri"/>
+              </a:rPr>
+              <a:t>Algorithm sketch — try these</a:t>
+            </a:r>
+          </a:p>
+        </p:txBody>
+      </p:sp>
+      <p:sp>
+        <p:nvSpPr>
+          <p:cNvPr id="3" name="TextBox 2"/>
+          <p:cNvSpPr txBox="1"/>
+          <p:nvPr/>
+        </p:nvSpPr>
+        <p:spPr>
+          <a:xfrm>
+            <a:off x="548640" y="1143000"/>
+            <a:ext cx="11064240" cy="5029200"/>
+          </a:xfrm>
+          <a:prstGeom prst="rect">
+            <a:avLst/>
+          </a:prstGeom>
+          <a:solidFill>
+            <a:srgbClr val="F4F4F4"/>
+          </a:solidFill>
+        </p:spPr>
+        <p:txBody>
+          <a:bodyPr wrap="square">
+            <a:noAutofit/>
+          </a:bodyPr>
+          <a:lstStyle/>
+          <a:p>
+            <a:pPr>
+              <a:lnSpc>
+                <a:spcPts val="2200"/>
+              </a:lnSpc>
+              <a:spcAft>
+                <a:spcPts val="400"/>
+              </a:spcAft>
+            </a:pPr>
+            <a:r>
+              <a:rPr sz="2000" b="0">
+                <a:solidFill>
+                  <a:srgbClr val="333333"/>
+                </a:solidFill>
+                <a:latin typeface="Consolas"/>
+              </a:rPr>
+              <a:t>INPUT: positions, grid Gx×Gy, capacity C</a:t>
+            </a:r>
+          </a:p>
+          <a:p>
+            <a:pPr>
+              <a:lnSpc>
+                <a:spcPts val="2200"/>
+              </a:lnSpc>
+              <a:spcAft>
+                <a:spcPts val="400"/>
+              </a:spcAft>
+            </a:pPr>
+            <a:r>
+              <a:rPr sz="2000" b="0">
+                <a:solidFill>
+                  <a:srgbClr val="333333"/>
+                </a:solidFill>
+                <a:latin typeface="Consolas"/>
+              </a:rPr>
+              <a:t>OUTPUT: overflow, per-bin counts</a:t>
+            </a:r>
+          </a:p>
+          <a:p>
+            <a:pPr>
+              <a:lnSpc>
+                <a:spcPts val="2200"/>
+              </a:lnSpc>
+              <a:spcAft>
+                <a:spcPts val="400"/>
+              </a:spcAft>
+            </a:pPr>
+            <a:r>
+              <a:rPr sz="2000" b="0">
+                <a:solidFill>
+                  <a:srgbClr val="333333"/>
+                </a:solidFill>
+                <a:latin typeface="Consolas"/>
+              </a:rPr>
+              <a:t>assign each cell to a bin by (x,y)</a:t>
+            </a:r>
+          </a:p>
+          <a:p>
+            <a:pPr>
+              <a:lnSpc>
+                <a:spcPts val="2200"/>
+              </a:lnSpc>
+              <a:spcAft>
+                <a:spcPts val="400"/>
+              </a:spcAft>
+            </a:pPr>
+            <a:r>
+              <a:rPr sz="2000" b="0">
+                <a:solidFill>
+                  <a:srgbClr val="333333"/>
+                </a:solidFill>
+                <a:latin typeface="Consolas"/>
+              </a:rPr>
+              <a:t>overflow ← Σ max(0, count[b]−C)</a:t>
+            </a:r>
+          </a:p>
+          <a:p>
+            <a:pPr>
+              <a:lnSpc>
+                <a:spcPts val="2200"/>
+              </a:lnSpc>
+              <a:spcAft>
+                <a:spcPts val="400"/>
+              </a:spcAft>
+            </a:pPr>
+            <a:r>
+              <a:rPr sz="2000" b="0">
+                <a:solidFill>
+                  <a:srgbClr val="333333"/>
+                </a:solidFill>
+                <a:latin typeface="Consolas"/>
+              </a:rPr>
+              <a:t>report HPWL with overflow</a:t>
+            </a:r>
+          </a:p>
+          <a:p>
+            <a:pPr>
+              <a:lnSpc>
+                <a:spcPts val="2200"/>
+              </a:lnSpc>
+              <a:spcAft>
+                <a:spcPts val="400"/>
+              </a:spcAft>
+            </a:pPr>
+            <a:r>
+              <a:rPr sz="2000" b="0">
+                <a:solidFill>
+                  <a:srgbClr val="333333"/>
+                </a:solidFill>
+                <a:latin typeface="Consolas"/>
+              </a:rPr>
+              <a:t>GOLDEN 2×2 C=1: starter&amp;golden overflow=2</a:t>
+            </a:r>
+          </a:p>
+          <a:p>
+            <a:pPr>
+              <a:lnSpc>
+                <a:spcPts val="2200"/>
+              </a:lnSpc>
+              <a:spcAft>
+                <a:spcPts val="400"/>
+              </a:spcAft>
+            </a:pPr>
+            <a:r>
+              <a:rPr sz="2000" b="0">
+                <a:solidFill>
+                  <a:srgbClr val="333333"/>
+                </a:solidFill>
+                <a:latin typeface="Consolas"/>
+              </a:rPr>
+              <a:t>C=2 on golden → overflow=1</a:t>
+            </a:r>
+          </a:p>
+        </p:txBody>
+      </p:sp>
+      <p:sp>
+        <p:nvSpPr>
+          <p:cNvPr id="4" name="TextBox 3"/>
+          <p:cNvSpPr txBox="1"/>
+          <p:nvPr/>
+        </p:nvSpPr>
+        <p:spPr>
+          <a:xfrm>
+            <a:off x="548640" y="6355080"/>
+            <a:ext cx="11064240" cy="320040"/>
+          </a:xfrm>
+          <a:prstGeom prst="rect">
+            <a:avLst/>
+          </a:prstGeom>
+          <a:noFill/>
+        </p:spPr>
+        <p:txBody>
+          <a:bodyPr wrap="square">
+            <a:noAutofit/>
+          </a:bodyPr>
+          <a:lstStyle/>
+          <a:p>
+            <a:pPr algn="r">
+              <a:lnSpc>
+                <a:spcPts val="2200"/>
+              </a:lnSpc>
+              <a:defRPr sz="1000" b="0">
+                <a:solidFill>
+                  <a:srgbClr val="666666"/>
+                </a:solidFill>
+                <a:latin typeface="Calibri"/>
+              </a:defRPr>
+            </a:pPr>
+            <a:r>
+              <a:t>learn_placement — 01 density bins</a:t>
+            </a:r>
+          </a:p>
+        </p:txBody>
+      </p:sp>
+    </p:spTree>
+  </p:cSld>
+  <p:clrMapOvr>
+    <a:masterClrMapping/>
+  </p:clrMapOvr>
+</p:sld>
+</file>
+
+<file path=ppt/slides/slide6.xml><?xml version="1.0" encoding="utf-8"?>
 <p:sld xmlns:a="http://schemas.openxmlformats.org/drawingml/2006/main" xmlns:p="http://schemas.openxmlformats.org/presentationml/2006/main" xmlns:r="http://schemas.openxmlformats.org/officeDocument/2006/relationships">
   <p:cSld>
     <p:spTree>
@@ -5030,7 +6316,7 @@
 </p:sld>
 </file>
 
-<file path=ppt/slides/slide4.xml><?xml version="1.0" encoding="utf-8"?>
+<file path=ppt/slides/slide7.xml><?xml version="1.0" encoding="utf-8"?>
 <p:sld xmlns:a="http://schemas.openxmlformats.org/drawingml/2006/main" xmlns:p="http://schemas.openxmlformats.org/presentationml/2006/main" xmlns:r="http://schemas.openxmlformats.org/officeDocument/2006/relationships">
   <p:cSld>
     <p:spTree>
@@ -5189,7 +6475,7 @@
 </p:sld>
 </file>
 
-<file path=ppt/slides/slide5.xml><?xml version="1.0" encoding="utf-8"?>
+<file path=ppt/slides/slide8.xml><?xml version="1.0" encoding="utf-8"?>
 <p:sld xmlns:a="http://schemas.openxmlformats.org/drawingml/2006/main" xmlns:p="http://schemas.openxmlformats.org/presentationml/2006/main" xmlns:r="http://schemas.openxmlformats.org/officeDocument/2006/relationships">
   <p:cSld>
     <p:spTree>
@@ -5348,7 +6634,7 @@
 </p:sld>
 </file>
 
-<file path=ppt/slides/slide6.xml><?xml version="1.0" encoding="utf-8"?>
+<file path=ppt/slides/slide9.xml><?xml version="1.0" encoding="utf-8"?>
 <p:sld xmlns:a="http://schemas.openxmlformats.org/drawingml/2006/main" xmlns:p="http://schemas.openxmlformats.org/presentationml/2006/main" xmlns:r="http://schemas.openxmlformats.org/officeDocument/2006/relationships">
   <p:cSld>
     <p:spTree>
@@ -5463,553 +6749,6 @@
       <p:sp>
         <p:nvSpPr>
           <p:cNvPr id="5" name="TextBox 4"/>
-          <p:cNvSpPr txBox="1"/>
-          <p:nvPr/>
-        </p:nvSpPr>
-        <p:spPr>
-          <a:xfrm>
-            <a:off x="548640" y="6355080"/>
-            <a:ext cx="11064240" cy="320040"/>
-          </a:xfrm>
-          <a:prstGeom prst="rect">
-            <a:avLst/>
-          </a:prstGeom>
-          <a:noFill/>
-        </p:spPr>
-        <p:txBody>
-          <a:bodyPr wrap="square">
-            <a:noAutofit/>
-          </a:bodyPr>
-          <a:lstStyle/>
-          <a:p>
-            <a:pPr algn="r">
-              <a:lnSpc>
-                <a:spcPts val="2200"/>
-              </a:lnSpc>
-              <a:defRPr sz="1000" b="0">
-                <a:solidFill>
-                  <a:srgbClr val="666666"/>
-                </a:solidFill>
-                <a:latin typeface="Calibri"/>
-              </a:defRPr>
-            </a:pPr>
-            <a:r>
-              <a:t>learn_placement — 01 density bins</a:t>
-            </a:r>
-          </a:p>
-        </p:txBody>
-      </p:sp>
-    </p:spTree>
-  </p:cSld>
-  <p:clrMapOvr>
-    <a:masterClrMapping/>
-  </p:clrMapOvr>
-</p:sld>
-</file>
-
-<file path=ppt/slides/slide7.xml><?xml version="1.0" encoding="utf-8"?>
-<p:sld xmlns:a="http://schemas.openxmlformats.org/drawingml/2006/main" xmlns:p="http://schemas.openxmlformats.org/presentationml/2006/main" xmlns:r="http://schemas.openxmlformats.org/officeDocument/2006/relationships">
-  <p:cSld>
-    <p:spTree>
-      <p:nvGrpSpPr>
-        <p:cNvPr id="1" name=""/>
-        <p:cNvGrpSpPr/>
-        <p:nvPr/>
-      </p:nvGrpSpPr>
-      <p:grpSpPr/>
-      <p:sp>
-        <p:nvSpPr>
-          <p:cNvPr id="2" name="TextBox 1"/>
-          <p:cNvSpPr txBox="1"/>
-          <p:nvPr/>
-        </p:nvSpPr>
-        <p:spPr>
-          <a:xfrm>
-            <a:off x="548640" y="411480"/>
-            <a:ext cx="11064240" cy="777240"/>
-          </a:xfrm>
-          <a:prstGeom prst="rect">
-            <a:avLst/>
-          </a:prstGeom>
-          <a:noFill/>
-        </p:spPr>
-        <p:txBody>
-          <a:bodyPr wrap="square">
-            <a:noAutofit/>
-          </a:bodyPr>
-          <a:lstStyle/>
-          <a:p>
-            <a:pPr>
-              <a:lnSpc>
-                <a:spcPts val="2200"/>
-              </a:lnSpc>
-            </a:pPr>
-            <a:r>
-              <a:rPr sz="2800" b="1">
-                <a:solidFill>
-                  <a:srgbClr val="1A1A2E"/>
-                </a:solidFill>
-                <a:latin typeface="Calibri"/>
-              </a:rPr>
-              <a:t>HPWL and density travel together</a:t>
-            </a:r>
-          </a:p>
-        </p:txBody>
-      </p:sp>
-      <p:pic>
-        <p:nvPicPr>
-          <p:cNvPr id="3" name="Picture 2" descr="05-takeaway.png"/>
-          <p:cNvPicPr>
-            <a:picLocks noChangeAspect="1"/>
-          </p:cNvPicPr>
-          <p:nvPr/>
-        </p:nvPicPr>
-        <p:blipFill>
-          <a:blip r:embed="rId2"/>
-          <a:stretch>
-            <a:fillRect/>
-          </a:stretch>
-        </p:blipFill>
-        <p:spPr>
-          <a:xfrm>
-            <a:off x="548640" y="1143000"/>
-            <a:ext cx="9404113" cy="4572000"/>
-          </a:xfrm>
-          <a:prstGeom prst="rect">
-            <a:avLst/>
-          </a:prstGeom>
-        </p:spPr>
-      </p:pic>
-      <p:sp>
-        <p:nvSpPr>
-          <p:cNvPr id="4" name="TextBox 3"/>
-          <p:cNvSpPr txBox="1"/>
-          <p:nvPr/>
-        </p:nvSpPr>
-        <p:spPr>
-          <a:xfrm>
-            <a:off x="548640" y="5897880"/>
-            <a:ext cx="11064240" cy="411480"/>
-          </a:xfrm>
-          <a:prstGeom prst="rect">
-            <a:avLst/>
-          </a:prstGeom>
-          <a:noFill/>
-        </p:spPr>
-        <p:txBody>
-          <a:bodyPr wrap="square">
-            <a:noAutofit/>
-          </a:bodyPr>
-          <a:lstStyle/>
-          <a:p>
-            <a:pPr>
-              <a:lnSpc>
-                <a:spcPts val="2200"/>
-              </a:lnSpc>
-            </a:pPr>
-            <a:r>
-              <a:rPr sz="1200" b="0">
-                <a:solidFill>
-                  <a:srgbClr val="333333"/>
-                </a:solidFill>
-                <a:latin typeface="Calibri"/>
-              </a:rPr>
-              <a:t>HPWL and density travel together</a:t>
-            </a:r>
-          </a:p>
-        </p:txBody>
-      </p:sp>
-      <p:sp>
-        <p:nvSpPr>
-          <p:cNvPr id="5" name="TextBox 4"/>
-          <p:cNvSpPr txBox="1"/>
-          <p:nvPr/>
-        </p:nvSpPr>
-        <p:spPr>
-          <a:xfrm>
-            <a:off x="548640" y="6355080"/>
-            <a:ext cx="11064240" cy="320040"/>
-          </a:xfrm>
-          <a:prstGeom prst="rect">
-            <a:avLst/>
-          </a:prstGeom>
-          <a:noFill/>
-        </p:spPr>
-        <p:txBody>
-          <a:bodyPr wrap="square">
-            <a:noAutofit/>
-          </a:bodyPr>
-          <a:lstStyle/>
-          <a:p>
-            <a:pPr algn="r">
-              <a:lnSpc>
-                <a:spcPts val="2200"/>
-              </a:lnSpc>
-              <a:defRPr sz="1000" b="0">
-                <a:solidFill>
-                  <a:srgbClr val="666666"/>
-                </a:solidFill>
-                <a:latin typeface="Calibri"/>
-              </a:defRPr>
-            </a:pPr>
-            <a:r>
-              <a:t>learn_placement — 01 density bins</a:t>
-            </a:r>
-          </a:p>
-        </p:txBody>
-      </p:sp>
-    </p:spTree>
-  </p:cSld>
-  <p:clrMapOvr>
-    <a:masterClrMapping/>
-  </p:clrMapOvr>
-</p:sld>
-</file>
-
-<file path=ppt/slides/slide8.xml><?xml version="1.0" encoding="utf-8"?>
-<p:sld xmlns:a="http://schemas.openxmlformats.org/drawingml/2006/main" xmlns:p="http://schemas.openxmlformats.org/presentationml/2006/main" xmlns:r="http://schemas.openxmlformats.org/officeDocument/2006/relationships">
-  <p:cSld>
-    <p:spTree>
-      <p:nvGrpSpPr>
-        <p:cNvPr id="1" name=""/>
-        <p:cNvGrpSpPr/>
-        <p:nvPr/>
-      </p:nvGrpSpPr>
-      <p:grpSpPr/>
-      <p:sp>
-        <p:nvSpPr>
-          <p:cNvPr id="2" name="TextBox 1"/>
-          <p:cNvSpPr txBox="1"/>
-          <p:nvPr/>
-        </p:nvSpPr>
-        <p:spPr>
-          <a:xfrm>
-            <a:off x="548640" y="411480"/>
-            <a:ext cx="11064240" cy="777240"/>
-          </a:xfrm>
-          <a:prstGeom prst="rect">
-            <a:avLst/>
-          </a:prstGeom>
-          <a:noFill/>
-        </p:spPr>
-        <p:txBody>
-          <a:bodyPr wrap="square">
-            <a:noAutofit/>
-          </a:bodyPr>
-          <a:lstStyle/>
-          <a:p>
-            <a:pPr>
-              <a:lnSpc>
-                <a:spcPts val="2200"/>
-              </a:lnSpc>
-            </a:pPr>
-            <a:r>
-              <a:rPr sz="2800" b="1">
-                <a:solidFill>
-                  <a:srgbClr val="1A1A2E"/>
-                </a:solidFill>
-                <a:latin typeface="Calibri"/>
-              </a:rPr>
-              <a:t>Browser lab track</a:t>
-            </a:r>
-          </a:p>
-        </p:txBody>
-      </p:sp>
-      <p:sp>
-        <p:nvSpPr>
-          <p:cNvPr id="3" name="TextBox 2"/>
-          <p:cNvSpPr txBox="1"/>
-          <p:nvPr/>
-        </p:nvSpPr>
-        <p:spPr>
-          <a:xfrm>
-            <a:off x="548640" y="1234440"/>
-            <a:ext cx="11064240" cy="4937760"/>
-          </a:xfrm>
-          <a:prstGeom prst="rect">
-            <a:avLst/>
-          </a:prstGeom>
-          <a:noFill/>
-        </p:spPr>
-        <p:txBody>
-          <a:bodyPr wrap="square">
-            <a:noAutofit/>
-          </a:bodyPr>
-          <a:lstStyle/>
-          <a:p>
-            <a:pPr lvl="0" marL="457200" indent="-228600">
-              <a:buFont typeface="Calibri"/>
-              <a:spcAft>
-                <a:spcPts val="1000"/>
-              </a:spcAft>
-              <a:buSzPct val="100000"/>
-              <a:buChar char="•"/>
-              <a:lnSpc>
-                <a:spcPts val="2200"/>
-              </a:lnSpc>
-            </a:pPr>
-            <a:r>
-              <a:rPr sz="2000" b="0">
-                <a:solidFill>
-                  <a:srgbClr val="333333"/>
-                </a:solidFill>
-                <a:latin typeface="Calibri"/>
-              </a:rPr>
-              <a:t>In the browser lab track, open the </a:t>
-            </a:r>
-            <a:r>
-              <a:rPr sz="2000" b="1">
-                <a:solidFill>
-                  <a:srgbClr val="333333"/>
-                </a:solidFill>
-                <a:latin typeface="Calibri"/>
-              </a:rPr>
-              <a:t>density-bins</a:t>
-            </a:r>
-            <a:r>
-              <a:rPr sz="2000" b="0">
-                <a:solidFill>
-                  <a:srgbClr val="333333"/>
-                </a:solidFill>
-                <a:latin typeface="Calibri"/>
-              </a:rPr>
-              <a:t> lab from the tools shelf</a:t>
-            </a:r>
-          </a:p>
-          <a:p>
-            <a:pPr lvl="0" marL="457200" indent="-228600">
-              <a:buFont typeface="Calibri"/>
-              <a:spcAft>
-                <a:spcPts val="1000"/>
-              </a:spcAft>
-              <a:buSzPct val="100000"/>
-              <a:buChar char="•"/>
-              <a:lnSpc>
-                <a:spcPts val="2200"/>
-              </a:lnSpc>
-            </a:pPr>
-            <a:r>
-              <a:rPr sz="2000" b="0">
-                <a:solidFill>
-                  <a:srgbClr val="333333"/>
-                </a:solidFill>
-                <a:latin typeface="Calibri"/>
-              </a:rPr>
-              <a:t>Load the starter placement, run the algorithm once</a:t>
-            </a:r>
-          </a:p>
-          <a:p>
-            <a:pPr lvl="0" marL="457200" indent="-228600">
-              <a:buFont typeface="Calibri"/>
-              <a:spcAft>
-                <a:spcPts val="1000"/>
-              </a:spcAft>
-              <a:buSzPct val="100000"/>
-              <a:buChar char="•"/>
-              <a:lnSpc>
-                <a:spcPts val="2200"/>
-              </a:lnSpc>
-            </a:pPr>
-            <a:r>
-              <a:rPr sz="2000" b="0">
-                <a:solidFill>
-                  <a:srgbClr val="333333"/>
-                </a:solidFill>
-                <a:latin typeface="Calibri"/>
-              </a:rPr>
-              <a:t>Work the challenges that lock the goldens</a:t>
-            </a:r>
-          </a:p>
-        </p:txBody>
-      </p:sp>
-      <p:sp>
-        <p:nvSpPr>
-          <p:cNvPr id="4" name="TextBox 3"/>
-          <p:cNvSpPr txBox="1"/>
-          <p:nvPr/>
-        </p:nvSpPr>
-        <p:spPr>
-          <a:xfrm>
-            <a:off x="548640" y="6355080"/>
-            <a:ext cx="11064240" cy="320040"/>
-          </a:xfrm>
-          <a:prstGeom prst="rect">
-            <a:avLst/>
-          </a:prstGeom>
-          <a:noFill/>
-        </p:spPr>
-        <p:txBody>
-          <a:bodyPr wrap="square">
-            <a:noAutofit/>
-          </a:bodyPr>
-          <a:lstStyle/>
-          <a:p>
-            <a:pPr algn="r">
-              <a:lnSpc>
-                <a:spcPts val="2200"/>
-              </a:lnSpc>
-              <a:defRPr sz="1000" b="0">
-                <a:solidFill>
-                  <a:srgbClr val="666666"/>
-                </a:solidFill>
-                <a:latin typeface="Calibri"/>
-              </a:defRPr>
-            </a:pPr>
-            <a:r>
-              <a:t>learn_placement — 01 density bins</a:t>
-            </a:r>
-          </a:p>
-        </p:txBody>
-      </p:sp>
-    </p:spTree>
-  </p:cSld>
-  <p:clrMapOvr>
-    <a:masterClrMapping/>
-  </p:clrMapOvr>
-</p:sld>
-</file>
-
-<file path=ppt/slides/slide9.xml><?xml version="1.0" encoding="utf-8"?>
-<p:sld xmlns:a="http://schemas.openxmlformats.org/drawingml/2006/main" xmlns:p="http://schemas.openxmlformats.org/presentationml/2006/main" xmlns:r="http://schemas.openxmlformats.org/officeDocument/2006/relationships">
-  <p:cSld>
-    <p:spTree>
-      <p:nvGrpSpPr>
-        <p:cNvPr id="1" name=""/>
-        <p:cNvGrpSpPr/>
-        <p:nvPr/>
-      </p:nvGrpSpPr>
-      <p:grpSpPr/>
-      <p:sp>
-        <p:nvSpPr>
-          <p:cNvPr id="2" name="TextBox 1"/>
-          <p:cNvSpPr txBox="1"/>
-          <p:nvPr/>
-        </p:nvSpPr>
-        <p:spPr>
-          <a:xfrm>
-            <a:off x="548640" y="411480"/>
-            <a:ext cx="11064240" cy="777240"/>
-          </a:xfrm>
-          <a:prstGeom prst="rect">
-            <a:avLst/>
-          </a:prstGeom>
-          <a:noFill/>
-        </p:spPr>
-        <p:txBody>
-          <a:bodyPr wrap="square">
-            <a:noAutofit/>
-          </a:bodyPr>
-          <a:lstStyle/>
-          <a:p>
-            <a:pPr>
-              <a:lnSpc>
-                <a:spcPts val="2200"/>
-              </a:lnSpc>
-            </a:pPr>
-            <a:r>
-              <a:rPr sz="2800" b="1">
-                <a:solidFill>
-                  <a:srgbClr val="1A1A2E"/>
-                </a:solidFill>
-                <a:latin typeface="Calibri"/>
-              </a:rPr>
-              <a:t>Implement track</a:t>
-            </a:r>
-          </a:p>
-        </p:txBody>
-      </p:sp>
-      <p:sp>
-        <p:nvSpPr>
-          <p:cNvPr id="3" name="TextBox 2"/>
-          <p:cNvSpPr txBox="1"/>
-          <p:nvPr/>
-        </p:nvSpPr>
-        <p:spPr>
-          <a:xfrm>
-            <a:off x="548640" y="1234440"/>
-            <a:ext cx="11064240" cy="4937760"/>
-          </a:xfrm>
-          <a:prstGeom prst="rect">
-            <a:avLst/>
-          </a:prstGeom>
-          <a:noFill/>
-        </p:spPr>
-        <p:txBody>
-          <a:bodyPr wrap="square">
-            <a:noAutofit/>
-          </a:bodyPr>
-          <a:lstStyle/>
-          <a:p>
-            <a:pPr lvl="0" marL="457200" indent="-228600">
-              <a:buFont typeface="Calibri"/>
-              <a:spcAft>
-                <a:spcPts val="1000"/>
-              </a:spcAft>
-              <a:buSzPct val="100000"/>
-              <a:buChar char="•"/>
-              <a:lnSpc>
-                <a:spcPts val="2200"/>
-              </a:lnSpc>
-            </a:pPr>
-            <a:r>
-              <a:rPr sz="2000" b="0">
-                <a:solidFill>
-                  <a:srgbClr val="333333"/>
-                </a:solidFill>
-                <a:latin typeface="Calibri"/>
-              </a:rPr>
-              <a:t>In the implement track, open this module’s examples and the course `common/` solvers</a:t>
-            </a:r>
-          </a:p>
-          <a:p>
-            <a:pPr lvl="0" marL="457200" indent="-228600">
-              <a:buFont typeface="Calibri"/>
-              <a:spcAft>
-                <a:spcPts val="1000"/>
-              </a:spcAft>
-              <a:buSzPct val="100000"/>
-              <a:buChar char="•"/>
-              <a:lnSpc>
-                <a:spcPts val="2200"/>
-              </a:lnSpc>
-            </a:pPr>
-            <a:r>
-              <a:rPr sz="2000" b="0">
-                <a:solidFill>
-                  <a:srgbClr val="333333"/>
-                </a:solidFill>
-                <a:latin typeface="Calibri"/>
-              </a:rPr>
-              <a:t>Parse `tiny_place.json`, run the algorithm with a deterministic seed</a:t>
-            </a:r>
-          </a:p>
-          <a:p>
-            <a:pPr lvl="0" marL="457200" indent="-228600">
-              <a:buFont typeface="Calibri"/>
-              <a:spcAft>
-                <a:spcPts val="1000"/>
-              </a:spcAft>
-              <a:buSzPct val="100000"/>
-              <a:buChar char="•"/>
-              <a:lnSpc>
-                <a:spcPts val="2200"/>
-              </a:lnSpc>
-            </a:pPr>
-            <a:r>
-              <a:rPr sz="2000" b="0">
-                <a:solidFill>
-                  <a:srgbClr val="333333"/>
-                </a:solidFill>
-                <a:latin typeface="Calibri"/>
-              </a:rPr>
-              <a:t>Match the browser goldens before you claim the checklist</a:t>
-            </a:r>
-          </a:p>
-        </p:txBody>
-      </p:sp>
-      <p:sp>
-        <p:nvSpPr>
-          <p:cNvPr id="4" name="TextBox 3"/>
           <p:cNvSpPr txBox="1"/>
           <p:nvPr/>
         </p:nvSpPr>
